--- a/설명 자료.pptx
+++ b/설명 자료.pptx
@@ -4900,42 +4900,6 @@
           </a:prstGeom>
         </p:spPr>
       </p:pic>
-      <p:sp>
-        <p:nvSpPr>
-          <p:cNvPr id="37" name="TextBox 36">
-            <a:extLst>
-              <a:ext uri="{FF2B5EF4-FFF2-40B4-BE49-F238E27FC236}">
-                <a16:creationId xmlns:a16="http://schemas.microsoft.com/office/drawing/2014/main" id="{F65F0378-4BA4-B10F-EABD-4E688A540EA7}"/>
-              </a:ext>
-            </a:extLst>
-          </p:cNvPr>
-          <p:cNvSpPr txBox="1"/>
-          <p:nvPr/>
-        </p:nvSpPr>
-        <p:spPr>
-          <a:xfrm>
-            <a:off x="3445099" y="2799083"/>
-            <a:ext cx="753414" cy="369332"/>
-          </a:xfrm>
-          <a:prstGeom prst="rect">
-            <a:avLst/>
-          </a:prstGeom>
-          <a:noFill/>
-        </p:spPr>
-        <p:txBody>
-          <a:bodyPr wrap="square" rtlCol="0">
-            <a:spAutoFit/>
-          </a:bodyPr>
-          <a:lstStyle/>
-          <a:p>
-            <a:r>
-              <a:rPr lang="en-US" altLang="ko-KR" dirty="0"/>
-              <a:t>“176”</a:t>
-            </a:r>
-            <a:endParaRPr lang="ko-KR" altLang="en-US" dirty="0"/>
-          </a:p>
-        </p:txBody>
-      </p:sp>
     </p:spTree>
     <p:extLst>
       <p:ext uri="{BB962C8B-B14F-4D97-AF65-F5344CB8AC3E}">
@@ -5853,42 +5817,6 @@
           </a:prstGeom>
         </p:spPr>
       </p:pic>
-      <p:sp>
-        <p:nvSpPr>
-          <p:cNvPr id="4" name="TextBox 3">
-            <a:extLst>
-              <a:ext uri="{FF2B5EF4-FFF2-40B4-BE49-F238E27FC236}">
-                <a16:creationId xmlns:a16="http://schemas.microsoft.com/office/drawing/2014/main" id="{578B7D48-8F32-D1CE-6AF6-B09BF6A90A5B}"/>
-              </a:ext>
-            </a:extLst>
-          </p:cNvPr>
-          <p:cNvSpPr txBox="1"/>
-          <p:nvPr/>
-        </p:nvSpPr>
-        <p:spPr>
-          <a:xfrm>
-            <a:off x="3445099" y="2799083"/>
-            <a:ext cx="753414" cy="369332"/>
-          </a:xfrm>
-          <a:prstGeom prst="rect">
-            <a:avLst/>
-          </a:prstGeom>
-          <a:noFill/>
-        </p:spPr>
-        <p:txBody>
-          <a:bodyPr wrap="square" rtlCol="0">
-            <a:spAutoFit/>
-          </a:bodyPr>
-          <a:lstStyle/>
-          <a:p>
-            <a:r>
-              <a:rPr lang="en-US" altLang="ko-KR" dirty="0"/>
-              <a:t>“176”</a:t>
-            </a:r>
-            <a:endParaRPr lang="ko-KR" altLang="en-US" dirty="0"/>
-          </a:p>
-        </p:txBody>
-      </p:sp>
     </p:spTree>
     <p:extLst>
       <p:ext uri="{BB962C8B-B14F-4D97-AF65-F5344CB8AC3E}">
